--- a/assets/pptx/catalog-154.pptx
+++ b/assets/pptx/catalog-154.pptx
@@ -3270,7 +3270,7 @@
                 <a:ea typeface="Ebrima"/>
                 <a:cs typeface="Ebrima"/>
               </a:rPr>
-              <a:t>የሚያሳስበኝ አንተን አንዴት እንደማስከብር ነው (2x)</a:t>
+              <a:t>የሚያሳስበኝ አንተን አንዴት እንደማስከብር ነው 2x</a:t>
             </a:r>
           </a:p>
         </p:txBody>
@@ -3355,7 +3355,7 @@
                 <a:ea typeface="Ebrima"/>
                 <a:cs typeface="Ebrima"/>
               </a:rPr>
-              <a:t>የሚጋብዘኝ ማንነትህ ነው (2X)</a:t>
+              <a:t>የሚጋብዘኝ ማንነትህ ነው 2X</a:t>
             </a:r>
           </a:p>
         </p:txBody>
@@ -3561,7 +3561,7 @@
                 <a:ea typeface="Ebrima"/>
                 <a:cs typeface="Ebrima"/>
               </a:rPr>
-              <a:t>ኑሮም ጐደለ እግዚአብሔር አለ (3x)</a:t>
+              <a:t>ኑሮም ጐደለ እግዚአብሔር አለ 3x</a:t>
             </a:r>
           </a:p>
         </p:txBody>
@@ -3646,7 +3646,7 @@
                 <a:ea typeface="Ebrima"/>
                 <a:cs typeface="Ebrima"/>
               </a:rPr>
-              <a:t>አመልካለሁ በውዴታ አየተገዛሁ ለጌታ (2x)</a:t>
+              <a:t>አመልካለሁ በውዴታ አየተገዛሁ ለጌታ 2x</a:t>
             </a:r>
           </a:p>
         </p:txBody>
@@ -3731,7 +3731,7 @@
                 <a:ea typeface="Ebrima"/>
                 <a:cs typeface="Ebrima"/>
               </a:rPr>
-              <a:t>ይልቁንም ፍቅሩ ጨምሮብኝ አጣሁኝ የምለው (2x)</a:t>
+              <a:t>ይልቁንም ፍቅሩ ጨምሮብኝ አጣሁኝ የምለው 2x</a:t>
             </a:r>
           </a:p>
         </p:txBody>
@@ -3816,7 +3816,7 @@
                 <a:ea typeface="Ebrima"/>
                 <a:cs typeface="Ebrima"/>
               </a:rPr>
-              <a:t>እኔ አስቲ ልዘምርለት ምቹ ሳለ ጊዜው (2x)</a:t>
+              <a:t>እኔ አስቲ ልዘምርለት ምቹ ሳለ ጊዜው 2x</a:t>
             </a:r>
           </a:p>
         </p:txBody>
@@ -4143,7 +4143,7 @@
                 <a:ea typeface="Ebrima"/>
                 <a:cs typeface="Ebrima"/>
               </a:rPr>
-              <a:t>ኑሮም ጐደለ እግዚአብሔር አለ (2x)</a:t>
+              <a:t>ኑሮም ጐደለ እግዚአብሔር አለ 2x</a:t>
             </a:r>
           </a:p>
         </p:txBody>
@@ -4246,7 +4246,7 @@
                 <a:ea typeface="Ebrima"/>
                 <a:cs typeface="Ebrima"/>
               </a:rPr>
-              <a:t>የማመሰግንበት ምክንያቴ የእግዚአብሔር ነው (2x)</a:t>
+              <a:t>የማመሰግንበት ምክንያቴ የእግዚአብሔር ነው 2x</a:t>
             </a:r>
           </a:p>
         </p:txBody>
@@ -4313,7 +4313,7 @@
                 <a:ea typeface="Ebrima"/>
                 <a:cs typeface="Ebrima"/>
               </a:rPr>
-              <a:t>ጌታ ካለ ቤቴ ሙሉ ነው (2x)</a:t>
+              <a:t>ጌታ ካለ ቤቴ ሙሉ ነው 2x</a:t>
             </a:r>
           </a:p>
           <a:p>
@@ -4331,7 +4331,7 @@
                 <a:ea typeface="Ebrima"/>
                 <a:cs typeface="Ebrima"/>
               </a:rPr>
-              <a:t>እጠግባለሁ ፊቱን እያየሁ (2x)</a:t>
+              <a:t>እጠግባለሁ ፊቱን እያየሁ 2x</a:t>
             </a:r>
           </a:p>
           <a:p>
@@ -4349,7 +4349,7 @@
                 <a:ea typeface="Ebrima"/>
                 <a:cs typeface="Ebrima"/>
               </a:rPr>
-              <a:t>እሱ ካለ ቤቴ ሙሉ ነው (2x)</a:t>
+              <a:t>እሱ ካለ ቤቴ ሙሉ ነው 2x</a:t>
             </a:r>
           </a:p>
           <a:p>
@@ -4367,7 +4367,7 @@
                 <a:ea typeface="Ebrima"/>
                 <a:cs typeface="Ebrima"/>
               </a:rPr>
-              <a:t>እጠግባለሁ ፊቱን እያየሁ (2x)</a:t>
+              <a:t>እጠግባለሁ ፊቱን እያየሁ 2x</a:t>
             </a:r>
           </a:p>
         </p:txBody>
